--- a/slides_drift.pptx
+++ b/slides_drift.pptx
@@ -108,7 +108,7 @@
   <p:extLst>
     <p:ext uri="{521415D9-36F7-43E2-AB2F-B90AF26B5E84}">
       <p14:sectionLst xmlns:p14="http://schemas.microsoft.com/office/powerpoint/2010/main">
-        <p14:section name="Results" id="{f743686a-90fc-086b-1122-5e0d9eb7f33e}">
+        <p14:section name="Results" id="{04aa9b15-d253-4dca-4cc5-c46a6a520354}">
           <p14:sldIdLst>
             <p14:sldId id="256"/>
             <p14:sldId id="257"/>
@@ -712,8 +712,8 @@
         </p:nvSpPr>
         <p:spPr>
           <a:xfrm>
-            <a:off x="457200" y="320040"/>
-            <a:ext cx="11274552" cy="731520"/>
+            <a:off x="457200" y="274320"/>
+            <a:ext cx="11274552" cy="640080"/>
           </a:xfrm>
           <a:prstGeom prst="rect">
             <a:avLst/>
@@ -1153,8 +1153,8 @@
         </p:nvSpPr>
         <p:spPr>
           <a:xfrm>
-            <a:off x="457200" y="320040"/>
-            <a:ext cx="11274552" cy="731520"/>
+            <a:off x="457200" y="274320"/>
+            <a:ext cx="11274552" cy="640080"/>
           </a:xfrm>
           <a:prstGeom prst="rect">
             <a:avLst/>
@@ -1178,7 +1178,7 @@
                 <a:ea typeface="Arial" pitchFamily="34" charset="-122"/>
                 <a:cs typeface="Arial" pitchFamily="34" charset="-120"/>
               </a:rPr>
-              <a:t>Euro area: wage response to oil and gas price shocks</a:t>
+              <a:t>Euro area: wage response to oil and gas supply shocks (IV)</a:t>
             </a:r>
             <a:endParaRPr lang="en-US" sz="2800" dirty="0"/>
           </a:p>
@@ -1192,7 +1192,60 @@
         </p:nvSpPr>
         <p:spPr>
           <a:xfrm>
-            <a:off x="457200" y="1188720"/>
+            <a:off x="457200" y="914400"/>
+            <a:ext cx="11274552" cy="365760"/>
+          </a:xfrm>
+          <a:prstGeom prst="rect">
+            <a:avLst/>
+          </a:prstGeom>
+          <a:noFill/>
+          <a:ln/>
+        </p:spPr>
+        <p:txBody>
+          <a:bodyPr wrap="square" lIns="0" tIns="0" rIns="0" bIns="0" rtlCol="0" anchor="ctr"/>
+          <a:lstStyle/>
+          <a:p>
+            <a:pPr indent="0" marL="0">
+              <a:buNone/>
+            </a:pPr>
+            <a:r>
+              <a:rPr lang="en-US" sz="1400" b="1" dirty="0">
+                <a:solidFill>
+                  <a:srgbClr val="1F2937"/>
+                </a:solidFill>
+                <a:latin typeface="Arial" pitchFamily="34" charset="0"/>
+                <a:ea typeface="Arial" pitchFamily="34" charset="-122"/>
+                <a:cs typeface="Arial" pitchFamily="34" charset="-120"/>
+              </a:rPr>
+              <a:t>Takeaway: </a:t>
+            </a:r>
+            <a:pPr indent="0" marL="0">
+              <a:buNone/>
+            </a:pPr>
+            <a:r>
+              <a:rPr lang="en-US" sz="1400" dirty="0">
+                <a:solidFill>
+                  <a:srgbClr val="C00000"/>
+                </a:solidFill>
+                <a:latin typeface="Arial" pitchFamily="34" charset="0"/>
+                <a:ea typeface="Arial" pitchFamily="34" charset="-122"/>
+                <a:cs typeface="Arial" pitchFamily="34" charset="-120"/>
+              </a:rPr>
+              <a:t>[TO BE COMPLETED: response of euro-area negotiated and hourly wages to oil and gas price increases driven by supply shocks]</a:t>
+            </a:r>
+            <a:endParaRPr lang="en-US" sz="1400" dirty="0"/>
+          </a:p>
+        </p:txBody>
+      </p:sp>
+      <p:sp>
+        <p:nvSpPr>
+          <p:cNvPr id="4" name="Text 2"/>
+          <p:cNvSpPr txBox="1"/>
+          <p:nvPr/>
+        </p:nvSpPr>
+        <p:spPr>
+          <a:xfrm>
+            <a:off x="457200" y="1371600"/>
             <a:ext cx="5486400" cy="365760"/>
           </a:xfrm>
           <a:prstGeom prst="rect">
@@ -1225,13 +1278,13 @@
       </p:sp>
       <p:sp>
         <p:nvSpPr>
-          <p:cNvPr id="4" name="Text 2"/>
+          <p:cNvPr id="5" name="Text 3"/>
           <p:cNvSpPr txBox="1"/>
           <p:nvPr/>
         </p:nvSpPr>
         <p:spPr>
           <a:xfrm>
-            <a:off x="6245352" y="1188720"/>
+            <a:off x="6245352" y="1371600"/>
             <a:ext cx="5486400" cy="365760"/>
           </a:xfrm>
           <a:prstGeom prst="rect">
@@ -1264,13 +1317,13 @@
       </p:sp>
       <p:sp>
         <p:nvSpPr>
-          <p:cNvPr id="5" name="placeholder lp_og_EA_contr.png"/>
+          <p:cNvPr id="6" name="placeholder lp_iv_og_EA_contr.png"/>
           <p:cNvSpPr txBox="1"/>
           <p:nvPr/>
         </p:nvSpPr>
         <p:spPr>
           <a:xfrm>
-            <a:off x="457200" y="1645920"/>
+            <a:off x="457200" y="1783080"/>
             <a:ext cx="5486400" cy="3986784"/>
           </a:xfrm>
           <a:prstGeom prst="rect">
@@ -1301,7 +1354,7 @@
                 <a:ea typeface="Arial" pitchFamily="34" charset="-122"/>
                 <a:cs typeface="Arial" pitchFamily="34" charset="-120"/>
               </a:rPr>
-              <a:t>Graph to be inserted: graphs/lp_og_EA_contr.png</a:t>
+              <a:t>Graph to be inserted: graphs/lp_iv_og_EA_contr.png</a:t>
             </a:r>
             <a:endParaRPr lang="en-US" sz="1400" dirty="0"/>
           </a:p>
@@ -1318,7 +1371,7 @@
                 <a:ea typeface="Arial" pitchFamily="34" charset="-122"/>
                 <a:cs typeface="Arial" pitchFamily="34" charset="-120"/>
               </a:rPr>
-              <a:t>(produced by an_lp_energy_ea.do)</a:t>
+              <a:t>(produced by the Stata run of master.do)</a:t>
             </a:r>
             <a:endParaRPr lang="en-US" sz="1400" dirty="0"/>
           </a:p>
@@ -1326,13 +1379,13 @@
       </p:sp>
       <p:sp>
         <p:nvSpPr>
-          <p:cNvPr id="6" name="placeholder lp_og_EA_wageH.png"/>
+          <p:cNvPr id="7" name="placeholder lp_iv_og_EA_wageH.png"/>
           <p:cNvSpPr txBox="1"/>
           <p:nvPr/>
         </p:nvSpPr>
         <p:spPr>
           <a:xfrm>
-            <a:off x="6245352" y="1645920"/>
+            <a:off x="6245352" y="1783080"/>
             <a:ext cx="5486400" cy="3986784"/>
           </a:xfrm>
           <a:prstGeom prst="rect">
@@ -1363,7 +1416,7 @@
                 <a:ea typeface="Arial" pitchFamily="34" charset="-122"/>
                 <a:cs typeface="Arial" pitchFamily="34" charset="-120"/>
               </a:rPr>
-              <a:t>Graph to be inserted: graphs/lp_og_EA_wageH.png</a:t>
+              <a:t>Graph to be inserted: graphs/lp_iv_og_EA_wageH.png</a:t>
             </a:r>
             <a:endParaRPr lang="en-US" sz="1400" dirty="0"/>
           </a:p>
@@ -1380,7 +1433,7 @@
                 <a:ea typeface="Arial" pitchFamily="34" charset="-122"/>
                 <a:cs typeface="Arial" pitchFamily="34" charset="-120"/>
               </a:rPr>
-              <a:t>(produced by an_lp_energy_ea.do)</a:t>
+              <a:t>(produced by the Stata run of master.do)</a:t>
             </a:r>
             <a:endParaRPr lang="en-US" sz="1400" dirty="0"/>
           </a:p>
@@ -1388,13 +1441,13 @@
       </p:sp>
       <p:sp>
         <p:nvSpPr>
-          <p:cNvPr id="7" name="Text 5"/>
+          <p:cNvPr id="8" name="Text 6"/>
           <p:cNvSpPr txBox="1"/>
           <p:nvPr/>
         </p:nvSpPr>
         <p:spPr>
           <a:xfrm>
-            <a:off x="457200" y="5852160"/>
+            <a:off x="457200" y="5897880"/>
             <a:ext cx="11274552" cy="685800"/>
           </a:xfrm>
           <a:prstGeom prst="rect">
@@ -1419,7 +1472,7 @@
                 <a:ea typeface="Arial" pitchFamily="34" charset="-122"/>
                 <a:cs typeface="Arial" pitchFamily="34" charset="-120"/>
               </a:rPr>
-              <a:t>Response (percentage points) of year-on-year wage growth to a 10 percentage point increase in the year-on-year growth of the oil and natural gas prices; 90% confidence bands. Local projections on euro-area time series. Sample (shock dates): negotiated wages, [sample period: available after running master.do]; hourly wages, [sample period: available after running master.do].</a:t>
+              <a:t>Response (percentage points) of year-on-year wage growth to a 10 percentage point increase in the year-on-year growth of the oil and natural gas prices; 90% confidence bands. 2SLS local projections: the oil price is instrumented with the Mori–Peersman oil supply news shocks, the gas price with the Alessandri–Gazzani gas supply shocks (three monthly shocks per quarter as instruments). Euro-area time series, Newey–West standard errors. Sample (shock dates): negotiated wages, [sample period: available after running master.do]; hourly wages, [sample period: available after running master.do].</a:t>
             </a:r>
             <a:endParaRPr lang="en-US" sz="1000" dirty="0"/>
           </a:p>
@@ -1508,8 +1561,8 @@
         </p:nvSpPr>
         <p:spPr>
           <a:xfrm>
-            <a:off x="457200" y="320040"/>
-            <a:ext cx="11274552" cy="731520"/>
+            <a:off x="457200" y="274320"/>
+            <a:ext cx="11274552" cy="640080"/>
           </a:xfrm>
           <a:prstGeom prst="rect">
             <a:avLst/>
@@ -1533,7 +1586,7 @@
                 <a:ea typeface="Arial" pitchFamily="34" charset="-122"/>
                 <a:cs typeface="Arial" pitchFamily="34" charset="-120"/>
               </a:rPr>
-              <a:t>Countries: wage response to oil and gas price shocks</a:t>
+              <a:t>Countries: wage response to oil and gas supply shocks (IV)</a:t>
             </a:r>
             <a:endParaRPr lang="en-US" sz="2800" dirty="0"/>
           </a:p>
@@ -1547,7 +1600,60 @@
         </p:nvSpPr>
         <p:spPr>
           <a:xfrm>
-            <a:off x="457200" y="1188720"/>
+            <a:off x="457200" y="914400"/>
+            <a:ext cx="11274552" cy="365760"/>
+          </a:xfrm>
+          <a:prstGeom prst="rect">
+            <a:avLst/>
+          </a:prstGeom>
+          <a:noFill/>
+          <a:ln/>
+        </p:spPr>
+        <p:txBody>
+          <a:bodyPr wrap="square" lIns="0" tIns="0" rIns="0" bIns="0" rtlCol="0" anchor="ctr"/>
+          <a:lstStyle/>
+          <a:p>
+            <a:pPr indent="0" marL="0">
+              <a:buNone/>
+            </a:pPr>
+            <a:r>
+              <a:rPr lang="en-US" sz="1400" b="1" dirty="0">
+                <a:solidFill>
+                  <a:srgbClr val="1F2937"/>
+                </a:solidFill>
+                <a:latin typeface="Arial" pitchFamily="34" charset="0"/>
+                <a:ea typeface="Arial" pitchFamily="34" charset="-122"/>
+                <a:cs typeface="Arial" pitchFamily="34" charset="-120"/>
+              </a:rPr>
+              <a:t>Takeaway: </a:t>
+            </a:r>
+            <a:pPr indent="0" marL="0">
+              <a:buNone/>
+            </a:pPr>
+            <a:r>
+              <a:rPr lang="en-US" sz="1400" dirty="0">
+                <a:solidFill>
+                  <a:srgbClr val="C00000"/>
+                </a:solidFill>
+                <a:latin typeface="Arial" pitchFamily="34" charset="0"/>
+                <a:ea typeface="Arial" pitchFamily="34" charset="-122"/>
+                <a:cs typeface="Arial" pitchFamily="34" charset="-120"/>
+              </a:rPr>
+              <a:t>[TO BE COMPLETED: cross-country differences in the IV responses and oil versus gas]</a:t>
+            </a:r>
+            <a:endParaRPr lang="en-US" sz="1400" dirty="0"/>
+          </a:p>
+        </p:txBody>
+      </p:sp>
+      <p:sp>
+        <p:nvSpPr>
+          <p:cNvPr id="4" name="Text 2"/>
+          <p:cNvSpPr txBox="1"/>
+          <p:nvPr/>
+        </p:nvSpPr>
+        <p:spPr>
+          <a:xfrm>
+            <a:off x="457200" y="1371600"/>
             <a:ext cx="5486400" cy="365760"/>
           </a:xfrm>
           <a:prstGeom prst="rect">
@@ -1580,13 +1686,13 @@
       </p:sp>
       <p:sp>
         <p:nvSpPr>
-          <p:cNvPr id="4" name="Text 2"/>
+          <p:cNvPr id="5" name="Text 3"/>
           <p:cNvSpPr txBox="1"/>
           <p:nvPr/>
         </p:nvSpPr>
         <p:spPr>
           <a:xfrm>
-            <a:off x="6245352" y="1188720"/>
+            <a:off x="6245352" y="1371600"/>
             <a:ext cx="5486400" cy="365760"/>
           </a:xfrm>
           <a:prstGeom prst="rect">
@@ -1619,14 +1725,14 @@
       </p:sp>
       <p:sp>
         <p:nvSpPr>
-          <p:cNvPr id="5" name="placeholder lp_og_ctry_contr_sq.png"/>
+          <p:cNvPr id="6" name="placeholder lp_iv_og_ctry_contr_sq.png"/>
           <p:cNvSpPr txBox="1"/>
           <p:nvPr/>
         </p:nvSpPr>
         <p:spPr>
           <a:xfrm>
-            <a:off x="1120140" y="1645920"/>
-            <a:ext cx="4160520" cy="4160520"/>
+            <a:off x="1188720" y="1783080"/>
+            <a:ext cx="4023360" cy="4023360"/>
           </a:xfrm>
           <a:prstGeom prst="rect">
             <a:avLst/>
@@ -1656,7 +1762,7 @@
                 <a:ea typeface="Arial" pitchFamily="34" charset="-122"/>
                 <a:cs typeface="Arial" pitchFamily="34" charset="-120"/>
               </a:rPr>
-              <a:t>Graph to be inserted: graphs/lp_og_ctry_contr_sq.png</a:t>
+              <a:t>Graph to be inserted: graphs/lp_iv_og_ctry_contr_sq.png</a:t>
             </a:r>
             <a:endParaRPr lang="en-US" sz="1400" dirty="0"/>
           </a:p>
@@ -1673,7 +1779,7 @@
                 <a:ea typeface="Arial" pitchFamily="34" charset="-122"/>
                 <a:cs typeface="Arial" pitchFamily="34" charset="-120"/>
               </a:rPr>
-              <a:t>(produced by an_lp_energy_ea.do)</a:t>
+              <a:t>(produced by the Stata run of master.do)</a:t>
             </a:r>
             <a:endParaRPr lang="en-US" sz="1400" dirty="0"/>
           </a:p>
@@ -1681,14 +1787,14 @@
       </p:sp>
       <p:sp>
         <p:nvSpPr>
-          <p:cNvPr id="6" name="placeholder lp_og_ctry_wageH_sq.png"/>
+          <p:cNvPr id="7" name="placeholder lp_iv_og_ctry_wageH_sq.png"/>
           <p:cNvSpPr txBox="1"/>
           <p:nvPr/>
         </p:nvSpPr>
         <p:spPr>
           <a:xfrm>
-            <a:off x="6908292" y="1645920"/>
-            <a:ext cx="4160520" cy="4160520"/>
+            <a:off x="6976872" y="1783080"/>
+            <a:ext cx="4023360" cy="4023360"/>
           </a:xfrm>
           <a:prstGeom prst="rect">
             <a:avLst/>
@@ -1718,7 +1824,7 @@
                 <a:ea typeface="Arial" pitchFamily="34" charset="-122"/>
                 <a:cs typeface="Arial" pitchFamily="34" charset="-120"/>
               </a:rPr>
-              <a:t>Graph to be inserted: graphs/lp_og_ctry_wageH_sq.png</a:t>
+              <a:t>Graph to be inserted: graphs/lp_iv_og_ctry_wageH_sq.png</a:t>
             </a:r>
             <a:endParaRPr lang="en-US" sz="1400" dirty="0"/>
           </a:p>
@@ -1735,7 +1841,7 @@
                 <a:ea typeface="Arial" pitchFamily="34" charset="-122"/>
                 <a:cs typeface="Arial" pitchFamily="34" charset="-120"/>
               </a:rPr>
-              <a:t>(produced by an_lp_energy_ea.do)</a:t>
+              <a:t>(produced by the Stata run of master.do)</a:t>
             </a:r>
             <a:endParaRPr lang="en-US" sz="1400" dirty="0"/>
           </a:p>
@@ -1743,13 +1849,13 @@
       </p:sp>
       <p:sp>
         <p:nvSpPr>
-          <p:cNvPr id="7" name="Text 5"/>
+          <p:cNvPr id="8" name="Text 6"/>
           <p:cNvSpPr txBox="1"/>
           <p:nvPr/>
         </p:nvSpPr>
         <p:spPr>
           <a:xfrm>
-            <a:off x="457200" y="5943600"/>
+            <a:off x="457200" y="5897880"/>
             <a:ext cx="11274552" cy="685800"/>
           </a:xfrm>
           <a:prstGeom prst="rect">
@@ -1774,7 +1880,7 @@
                 <a:ea typeface="Arial" pitchFamily="34" charset="-122"/>
                 <a:cs typeface="Arial" pitchFamily="34" charset="-120"/>
               </a:rPr>
-              <a:t>Response (percentage points) of year-on-year wage growth to a 10 percentage point increase in the year-on-year growth of the oil and natural gas prices; 90% confidence bands. Local projections on time series for the euro area and each country; same vertical scale within each graph; the sample period (shock dates) of each panel is shown under its name.</a:t>
+              <a:t>Response (percentage points) of year-on-year wage growth to a 10 percentage point increase in the year-on-year growth of the oil and natural gas prices; 90% confidence bands. 2SLS local projections: the oil price is instrumented with the Mori–Peersman oil supply news shocks, the gas price with the Alessandri–Gazzani gas supply shocks (three monthly shocks per quarter as instruments). Time series for the euro area and each country, Newey–West standard errors; same vertical scale within each graph; the sample period (shock dates) of each panel is shown under its name.</a:t>
             </a:r>
             <a:endParaRPr lang="en-US" sz="1000" dirty="0"/>
           </a:p>

--- a/slides_drift.pptx
+++ b/slides_drift.pptx
@@ -108,7 +108,7 @@
   <p:extLst>
     <p:ext uri="{521415D9-36F7-43E2-AB2F-B90AF26B5E84}">
       <p14:sectionLst xmlns:p14="http://schemas.microsoft.com/office/powerpoint/2010/main">
-        <p14:section name="Results" id="{04aa9b15-d253-4dca-4cc5-c46a6a520354}">
+        <p14:section name="Results" id="{5790a8ea-ef7c-a654-25d7-3cd5ec7b76f9}">
           <p14:sldIdLst>
             <p14:sldId id="256"/>
             <p14:sldId id="257"/>
@@ -1315,12 +1315,20 @@
           </a:p>
         </p:txBody>
       </p:sp>
-      <p:sp>
-        <p:nvSpPr>
-          <p:cNvPr id="6" name="placeholder lp_iv_og_EA_contr.png"/>
-          <p:cNvSpPr txBox="1"/>
+      <p:pic>
+        <p:nvPicPr>
+          <p:cNvPr id="6" name="lp_iv_og_EA_contr.png" descr="lp_iv_og_EA_contr.png">    </p:cNvPr>
+          <p:cNvPicPr>
+            <a:picLocks noChangeAspect="1"/>
+          </p:cNvPicPr>
           <p:nvPr/>
-        </p:nvSpPr>
+        </p:nvPicPr>
+        <p:blipFill>
+          <a:blip r:embed="rId1"/>
+          <a:stretch>
+            <a:fillRect/>
+          </a:stretch>
+        </p:blipFill>
         <p:spPr>
           <a:xfrm>
             <a:off x="457200" y="1783080"/>
@@ -1329,60 +1337,22 @@
           <a:prstGeom prst="rect">
             <a:avLst/>
           </a:prstGeom>
-          <a:solidFill>
-            <a:srgbClr val="F1F3F5"/>
-          </a:solidFill>
-          <a:ln w="9525">
-            <a:solidFill>
-              <a:srgbClr val="D0D4DA"/>
-            </a:solidFill>
-          </a:ln>
-        </p:spPr>
-        <p:txBody>
-          <a:bodyPr wrap="square" rtlCol="0" anchor="ctr"/>
-          <a:lstStyle/>
-          <a:p>
-            <a:pPr algn="ctr" indent="0" marL="0">
-              <a:buNone/>
-            </a:pPr>
-            <a:r>
-              <a:rPr lang="en-US" sz="1400" dirty="0">
-                <a:solidFill>
-                  <a:srgbClr val="5B6472"/>
-                </a:solidFill>
-                <a:latin typeface="Arial" pitchFamily="34" charset="0"/>
-                <a:ea typeface="Arial" pitchFamily="34" charset="-122"/>
-                <a:cs typeface="Arial" pitchFamily="34" charset="-120"/>
-              </a:rPr>
-              <a:t>Graph to be inserted: graphs/lp_iv_og_EA_contr.png</a:t>
-            </a:r>
-            <a:endParaRPr lang="en-US" sz="1400" dirty="0"/>
-          </a:p>
-          <a:p>
-            <a:pPr algn="ctr" indent="0" marL="0">
-              <a:buNone/>
-            </a:pPr>
-            <a:r>
-              <a:rPr lang="en-US" sz="1400" dirty="0">
-                <a:solidFill>
-                  <a:srgbClr val="5B6472"/>
-                </a:solidFill>
-                <a:latin typeface="Arial" pitchFamily="34" charset="0"/>
-                <a:ea typeface="Arial" pitchFamily="34" charset="-122"/>
-                <a:cs typeface="Arial" pitchFamily="34" charset="-120"/>
-              </a:rPr>
-              <a:t>(produced by the Stata run of master.do)</a:t>
-            </a:r>
-            <a:endParaRPr lang="en-US" sz="1400" dirty="0"/>
-          </a:p>
-        </p:txBody>
-      </p:sp>
-      <p:sp>
-        <p:nvSpPr>
-          <p:cNvPr id="7" name="placeholder lp_iv_og_EA_wageH.png"/>
-          <p:cNvSpPr txBox="1"/>
+        </p:spPr>
+      </p:pic>
+      <p:pic>
+        <p:nvPicPr>
+          <p:cNvPr id="7" name="lp_iv_og_EA_wageH.png" descr="lp_iv_og_EA_wageH.png">    </p:cNvPr>
+          <p:cNvPicPr>
+            <a:picLocks noChangeAspect="1"/>
+          </p:cNvPicPr>
           <p:nvPr/>
-        </p:nvSpPr>
+        </p:nvPicPr>
+        <p:blipFill>
+          <a:blip r:embed="rId2"/>
+          <a:stretch>
+            <a:fillRect/>
+          </a:stretch>
+        </p:blipFill>
         <p:spPr>
           <a:xfrm>
             <a:off x="6245352" y="1783080"/>
@@ -1391,57 +1361,11 @@
           <a:prstGeom prst="rect">
             <a:avLst/>
           </a:prstGeom>
-          <a:solidFill>
-            <a:srgbClr val="F1F3F5"/>
-          </a:solidFill>
-          <a:ln w="9525">
-            <a:solidFill>
-              <a:srgbClr val="D0D4DA"/>
-            </a:solidFill>
-          </a:ln>
-        </p:spPr>
-        <p:txBody>
-          <a:bodyPr wrap="square" rtlCol="0" anchor="ctr"/>
-          <a:lstStyle/>
-          <a:p>
-            <a:pPr algn="ctr" indent="0" marL="0">
-              <a:buNone/>
-            </a:pPr>
-            <a:r>
-              <a:rPr lang="en-US" sz="1400" dirty="0">
-                <a:solidFill>
-                  <a:srgbClr val="5B6472"/>
-                </a:solidFill>
-                <a:latin typeface="Arial" pitchFamily="34" charset="0"/>
-                <a:ea typeface="Arial" pitchFamily="34" charset="-122"/>
-                <a:cs typeface="Arial" pitchFamily="34" charset="-120"/>
-              </a:rPr>
-              <a:t>Graph to be inserted: graphs/lp_iv_og_EA_wageH.png</a:t>
-            </a:r>
-            <a:endParaRPr lang="en-US" sz="1400" dirty="0"/>
-          </a:p>
-          <a:p>
-            <a:pPr algn="ctr" indent="0" marL="0">
-              <a:buNone/>
-            </a:pPr>
-            <a:r>
-              <a:rPr lang="en-US" sz="1400" dirty="0">
-                <a:solidFill>
-                  <a:srgbClr val="5B6472"/>
-                </a:solidFill>
-                <a:latin typeface="Arial" pitchFamily="34" charset="0"/>
-                <a:ea typeface="Arial" pitchFamily="34" charset="-122"/>
-                <a:cs typeface="Arial" pitchFamily="34" charset="-120"/>
-              </a:rPr>
-              <a:t>(produced by the Stata run of master.do)</a:t>
-            </a:r>
-            <a:endParaRPr lang="en-US" sz="1400" dirty="0"/>
-          </a:p>
-        </p:txBody>
-      </p:sp>
-      <p:sp>
-        <p:nvSpPr>
-          <p:cNvPr id="8" name="Text 6"/>
+        </p:spPr>
+      </p:pic>
+      <p:sp>
+        <p:nvSpPr>
+          <p:cNvPr id="8" name="Text 4"/>
           <p:cNvSpPr txBox="1"/>
           <p:nvPr/>
         </p:nvSpPr>
@@ -1472,7 +1396,7 @@
                 <a:ea typeface="Arial" pitchFamily="34" charset="-122"/>
                 <a:cs typeface="Arial" pitchFamily="34" charset="-120"/>
               </a:rPr>
-              <a:t>Response (percentage points) of year-on-year wage growth to a 10 percentage point increase in the year-on-year growth of the oil and natural gas prices; 90% confidence bands. 2SLS local projections: the oil price is instrumented with the Mori–Peersman oil supply news shocks, the gas price with the Alessandri–Gazzani gas supply shocks (three monthly shocks per quarter as instruments). Euro-area time series, Newey–West standard errors. Sample (shock dates): negotiated wages, [sample period: available after running master.do]; hourly wages, [sample period: available after running master.do].</a:t>
+              <a:t>Response (percentage points) of year-on-year wage growth to a 10% increase in the oil and natural gas prices; 90% confidence bands. 2SLS local projections: the oil price is instrumented with the Mori–Peersman oil supply news shocks, the gas price with the Alessandri–Gazzani gas supply shocks (quarterly average of the monthly shocks). Euro-area time series, Newey–West standard errors. Sample (shock dates): negotiated wages, oil 2001q1–2025q4; gas 2008q1–2025q4; hourly wages, oil 2001q1–2025q4; gas 2008q1–2025q4.</a:t>
             </a:r>
             <a:endParaRPr lang="en-US" sz="1000" dirty="0"/>
           </a:p>
@@ -1723,12 +1647,20 @@
           </a:p>
         </p:txBody>
       </p:sp>
-      <p:sp>
-        <p:nvSpPr>
-          <p:cNvPr id="6" name="placeholder lp_iv_og_ctry_contr_sq.png"/>
-          <p:cNvSpPr txBox="1"/>
+      <p:pic>
+        <p:nvPicPr>
+          <p:cNvPr id="6" name="lp_iv_og_ctry_contr_sq.png" descr="lp_iv_og_ctry_contr_sq.png">    </p:cNvPr>
+          <p:cNvPicPr>
+            <a:picLocks noChangeAspect="1"/>
+          </p:cNvPicPr>
           <p:nvPr/>
-        </p:nvSpPr>
+        </p:nvPicPr>
+        <p:blipFill>
+          <a:blip r:embed="rId1"/>
+          <a:stretch>
+            <a:fillRect/>
+          </a:stretch>
+        </p:blipFill>
         <p:spPr>
           <a:xfrm>
             <a:off x="1188720" y="1783080"/>
@@ -1737,60 +1669,22 @@
           <a:prstGeom prst="rect">
             <a:avLst/>
           </a:prstGeom>
-          <a:solidFill>
-            <a:srgbClr val="F1F3F5"/>
-          </a:solidFill>
-          <a:ln w="9525">
-            <a:solidFill>
-              <a:srgbClr val="D0D4DA"/>
-            </a:solidFill>
-          </a:ln>
-        </p:spPr>
-        <p:txBody>
-          <a:bodyPr wrap="square" rtlCol="0" anchor="ctr"/>
-          <a:lstStyle/>
-          <a:p>
-            <a:pPr algn="ctr" indent="0" marL="0">
-              <a:buNone/>
-            </a:pPr>
-            <a:r>
-              <a:rPr lang="en-US" sz="1400" dirty="0">
-                <a:solidFill>
-                  <a:srgbClr val="5B6472"/>
-                </a:solidFill>
-                <a:latin typeface="Arial" pitchFamily="34" charset="0"/>
-                <a:ea typeface="Arial" pitchFamily="34" charset="-122"/>
-                <a:cs typeface="Arial" pitchFamily="34" charset="-120"/>
-              </a:rPr>
-              <a:t>Graph to be inserted: graphs/lp_iv_og_ctry_contr_sq.png</a:t>
-            </a:r>
-            <a:endParaRPr lang="en-US" sz="1400" dirty="0"/>
-          </a:p>
-          <a:p>
-            <a:pPr algn="ctr" indent="0" marL="0">
-              <a:buNone/>
-            </a:pPr>
-            <a:r>
-              <a:rPr lang="en-US" sz="1400" dirty="0">
-                <a:solidFill>
-                  <a:srgbClr val="5B6472"/>
-                </a:solidFill>
-                <a:latin typeface="Arial" pitchFamily="34" charset="0"/>
-                <a:ea typeface="Arial" pitchFamily="34" charset="-122"/>
-                <a:cs typeface="Arial" pitchFamily="34" charset="-120"/>
-              </a:rPr>
-              <a:t>(produced by the Stata run of master.do)</a:t>
-            </a:r>
-            <a:endParaRPr lang="en-US" sz="1400" dirty="0"/>
-          </a:p>
-        </p:txBody>
-      </p:sp>
-      <p:sp>
-        <p:nvSpPr>
-          <p:cNvPr id="7" name="placeholder lp_iv_og_ctry_wageH_sq.png"/>
-          <p:cNvSpPr txBox="1"/>
+        </p:spPr>
+      </p:pic>
+      <p:pic>
+        <p:nvPicPr>
+          <p:cNvPr id="7" name="lp_iv_og_ctry_wageH_sq.png" descr="lp_iv_og_ctry_wageH_sq.png">    </p:cNvPr>
+          <p:cNvPicPr>
+            <a:picLocks noChangeAspect="1"/>
+          </p:cNvPicPr>
           <p:nvPr/>
-        </p:nvSpPr>
+        </p:nvPicPr>
+        <p:blipFill>
+          <a:blip r:embed="rId2"/>
+          <a:stretch>
+            <a:fillRect/>
+          </a:stretch>
+        </p:blipFill>
         <p:spPr>
           <a:xfrm>
             <a:off x="6976872" y="1783080"/>
@@ -1799,57 +1693,11 @@
           <a:prstGeom prst="rect">
             <a:avLst/>
           </a:prstGeom>
-          <a:solidFill>
-            <a:srgbClr val="F1F3F5"/>
-          </a:solidFill>
-          <a:ln w="9525">
-            <a:solidFill>
-              <a:srgbClr val="D0D4DA"/>
-            </a:solidFill>
-          </a:ln>
-        </p:spPr>
-        <p:txBody>
-          <a:bodyPr wrap="square" rtlCol="0" anchor="ctr"/>
-          <a:lstStyle/>
-          <a:p>
-            <a:pPr algn="ctr" indent="0" marL="0">
-              <a:buNone/>
-            </a:pPr>
-            <a:r>
-              <a:rPr lang="en-US" sz="1400" dirty="0">
-                <a:solidFill>
-                  <a:srgbClr val="5B6472"/>
-                </a:solidFill>
-                <a:latin typeface="Arial" pitchFamily="34" charset="0"/>
-                <a:ea typeface="Arial" pitchFamily="34" charset="-122"/>
-                <a:cs typeface="Arial" pitchFamily="34" charset="-120"/>
-              </a:rPr>
-              <a:t>Graph to be inserted: graphs/lp_iv_og_ctry_wageH_sq.png</a:t>
-            </a:r>
-            <a:endParaRPr lang="en-US" sz="1400" dirty="0"/>
-          </a:p>
-          <a:p>
-            <a:pPr algn="ctr" indent="0" marL="0">
-              <a:buNone/>
-            </a:pPr>
-            <a:r>
-              <a:rPr lang="en-US" sz="1400" dirty="0">
-                <a:solidFill>
-                  <a:srgbClr val="5B6472"/>
-                </a:solidFill>
-                <a:latin typeface="Arial" pitchFamily="34" charset="0"/>
-                <a:ea typeface="Arial" pitchFamily="34" charset="-122"/>
-                <a:cs typeface="Arial" pitchFamily="34" charset="-120"/>
-              </a:rPr>
-              <a:t>(produced by the Stata run of master.do)</a:t>
-            </a:r>
-            <a:endParaRPr lang="en-US" sz="1400" dirty="0"/>
-          </a:p>
-        </p:txBody>
-      </p:sp>
-      <p:sp>
-        <p:nvSpPr>
-          <p:cNvPr id="8" name="Text 6"/>
+        </p:spPr>
+      </p:pic>
+      <p:sp>
+        <p:nvSpPr>
+          <p:cNvPr id="8" name="Text 4"/>
           <p:cNvSpPr txBox="1"/>
           <p:nvPr/>
         </p:nvSpPr>
@@ -1880,7 +1728,7 @@
                 <a:ea typeface="Arial" pitchFamily="34" charset="-122"/>
                 <a:cs typeface="Arial" pitchFamily="34" charset="-120"/>
               </a:rPr>
-              <a:t>Response (percentage points) of year-on-year wage growth to a 10 percentage point increase in the year-on-year growth of the oil and natural gas prices; 90% confidence bands. 2SLS local projections: the oil price is instrumented with the Mori–Peersman oil supply news shocks, the gas price with the Alessandri–Gazzani gas supply shocks (three monthly shocks per quarter as instruments). Time series for the euro area and each country, Newey–West standard errors; same vertical scale within each graph; the sample period (shock dates) of each panel is shown under its name.</a:t>
+              <a:t>Response (percentage points) of year-on-year wage growth to a 10% increase in the oil and natural gas prices; 90% confidence bands. 2SLS local projections: the oil price is instrumented with the Mori–Peersman oil supply news shocks, the gas price with the Alessandri–Gazzani gas supply shocks (quarterly average of the monthly shocks). Time series for the euro area and each country, Newey–West standard errors; same vertical scale within each graph; the sample period (shock dates) of each panel is shown under its name.</a:t>
             </a:r>
             <a:endParaRPr lang="en-US" sz="1000" dirty="0"/>
           </a:p>

--- a/slides_drift.pptx
+++ b/slides_drift.pptx
@@ -108,7 +108,7 @@
   <p:extLst>
     <p:ext uri="{521415D9-36F7-43E2-AB2F-B90AF26B5E84}">
       <p14:sectionLst xmlns:p14="http://schemas.microsoft.com/office/powerpoint/2010/main">
-        <p14:section name="Results" id="{5790a8ea-ef7c-a654-25d7-3cd5ec7b76f9}">
+        <p14:section name="Results" id="{03a528bd-adb5-9eca-d5a7-0a743c271e2d}">
           <p14:sldIdLst>
             <p14:sldId id="256"/>
             <p14:sldId id="257"/>
@@ -1396,7 +1396,7 @@
                 <a:ea typeface="Arial" pitchFamily="34" charset="-122"/>
                 <a:cs typeface="Arial" pitchFamily="34" charset="-120"/>
               </a:rPr>
-              <a:t>Response (percentage points) of year-on-year wage growth to a 10% increase in the oil and natural gas prices; 90% confidence bands. 2SLS local projections: the oil price is instrumented with the Mori–Peersman oil supply news shocks, the gas price with the Alessandri–Gazzani gas supply shocks (quarterly average of the monthly shocks). Euro-area time series, Newey–West standard errors. Sample (shock dates): negotiated wages, oil 2001q1–2025q4; gas 2008q1–2025q4; hourly wages, oil 2001q1–2025q4; gas 2008q1–2025q4.</a:t>
+              <a:t>Response (percentage points) of year-on-year wage growth to a 10% increase in the oil and natural gas prices; 90% confidence bands. Smooth 2SLS local projections (Barnichon–Brownlees; bands by undersmoothing): the oil price is instrumented with the Mori–Peersman oil supply news shocks, the gas price with the Alessandri–Gazzani gas supply shocks (quarterly average of the monthly shocks). Euro-area time series, Newey–West standard errors. Sample (shock dates): negotiated wages, oil 2000q3–2025q4; gas 2006q4–2025q4; hourly wages, oil 2000q3–2025q4; gas 2006q4–2025q4.</a:t>
             </a:r>
             <a:endParaRPr lang="en-US" sz="1000" dirty="0"/>
           </a:p>
@@ -1728,7 +1728,7 @@
                 <a:ea typeface="Arial" pitchFamily="34" charset="-122"/>
                 <a:cs typeface="Arial" pitchFamily="34" charset="-120"/>
               </a:rPr>
-              <a:t>Response (percentage points) of year-on-year wage growth to a 10% increase in the oil and natural gas prices; 90% confidence bands. 2SLS local projections: the oil price is instrumented with the Mori–Peersman oil supply news shocks, the gas price with the Alessandri–Gazzani gas supply shocks (quarterly average of the monthly shocks). Time series for the euro area and each country, Newey–West standard errors; same vertical scale within each graph; the sample period (shock dates) of each panel is shown under its name.</a:t>
+              <a:t>Response (percentage points) of year-on-year wage growth to a 10% increase in the oil and natural gas prices; 90% confidence bands. Smooth 2SLS local projections (Barnichon–Brownlees; bands by undersmoothing): the oil price is instrumented with the Mori–Peersman oil supply news shocks, the gas price with the Alessandri–Gazzani gas supply shocks (quarterly average of the monthly shocks). Time series for the euro area and each country, Newey–West standard errors; same vertical scale within each graph; the sample period (shock dates) of each panel is shown under its name.</a:t>
             </a:r>
             <a:endParaRPr lang="en-US" sz="1000" dirty="0"/>
           </a:p>

--- a/slides_drift.pptx
+++ b/slides_drift.pptx
@@ -108,7 +108,7 @@
   <p:extLst>
     <p:ext uri="{521415D9-36F7-43E2-AB2F-B90AF26B5E84}">
       <p14:sectionLst xmlns:p14="http://schemas.microsoft.com/office/powerpoint/2010/main">
-        <p14:section name="Results" id="{03a528bd-adb5-9eca-d5a7-0a743c271e2d}">
+        <p14:section name="Results" id="{1b81744c-a98d-a96b-9dbe-733165c1320e}">
           <p14:sldIdLst>
             <p14:sldId id="256"/>
             <p14:sldId id="257"/>
@@ -1728,7 +1728,7 @@
                 <a:ea typeface="Arial" pitchFamily="34" charset="-122"/>
                 <a:cs typeface="Arial" pitchFamily="34" charset="-120"/>
               </a:rPr>
-              <a:t>Response (percentage points) of year-on-year wage growth to a 10% increase in the oil and natural gas prices; 90% confidence bands. Smooth 2SLS local projections (Barnichon–Brownlees; bands by undersmoothing): the oil price is instrumented with the Mori–Peersman oil supply news shocks, the gas price with the Alessandri–Gazzani gas supply shocks (quarterly average of the monthly shocks). Time series for the euro area and each country, Newey–West standard errors; same vertical scale within each graph; the sample period (shock dates) of each panel is shown under its name.</a:t>
+              <a:t>Response (percentage points) of year-on-year wage growth to a 10% increase in the oil and natural gas prices; 90% confidence bands. Smooth 2SLS local projections (Barnichon–Brownlees; bands by undersmoothing): the oil price is instrumented with the Mori–Peersman oil supply news shocks, the gas price with the Alessandri–Gazzani gas supply shocks (quarterly average of the monthly shocks). Time series for the euro area and each country, Newey–West standard errors; same vertical scale in all panels unless the widths of the confidence bands differ by more than 1.6 pp (then each panel has its own scale, with the same spacing between labels); the sample period (shock dates) of each panel is shown under its name.</a:t>
             </a:r>
             <a:endParaRPr lang="en-US" sz="1000" dirty="0"/>
           </a:p>
